--- a/ChronicCareAI.pptx
+++ b/ChronicCareAI.pptx
@@ -5,7 +5,7 @@
     <p:sldMasterId id="2147483648" r:id="rId1"/>
   </p:sldMasterIdLst>
   <p:notesMasterIdLst>
-    <p:notesMasterId r:id="rId17"/>
+    <p:notesMasterId r:id="rId19"/>
   </p:notesMasterIdLst>
   <p:sldIdLst>
     <p:sldId id="283" r:id="rId2"/>
@@ -18,11 +18,13 @@
     <p:sldId id="264" r:id="rId9"/>
     <p:sldId id="277" r:id="rId10"/>
     <p:sldId id="286" r:id="rId11"/>
-    <p:sldId id="287" r:id="rId12"/>
-    <p:sldId id="280" r:id="rId13"/>
-    <p:sldId id="288" r:id="rId14"/>
-    <p:sldId id="289" r:id="rId15"/>
-    <p:sldId id="276" r:id="rId16"/>
+    <p:sldId id="291" r:id="rId12"/>
+    <p:sldId id="292" r:id="rId13"/>
+    <p:sldId id="287" r:id="rId14"/>
+    <p:sldId id="280" r:id="rId15"/>
+    <p:sldId id="288" r:id="rId16"/>
+    <p:sldId id="289" r:id="rId17"/>
+    <p:sldId id="276" r:id="rId18"/>
   </p:sldIdLst>
   <p:sldSz cx="12192000" cy="6858000"/>
   <p:notesSz cx="6858000" cy="9144000"/>
@@ -256,6 +258,9 @@
     </a:lvl9pPr>
   </p:defaultTextStyle>
   <p:extLst>
+    <p:ext uri="{EFAFB233-063F-42B5-8137-9DF3F51BA10A}">
+      <p15:sldGuideLst xmlns:p15="http://schemas.microsoft.com/office/powerpoint/2012/main"/>
+    </p:ext>
     <p:ext uri="GoogleSlidesCustomDataVersion2">
       <go:slidesCustomData xmlns:go="http://customooxmlschemas.google.com/" xmlns:ahyp="http://schemas.microsoft.com/office/drawing/2018/hyperlinkcolor" xmlns:p15="http://schemas.microsoft.com/office/powerpoint/2012/main" xmlns:p14="http://schemas.microsoft.com/office/powerpoint/2010/main" xmlns:com="http://schemas.openxmlformats.org/drawingml/2006/compatibility" xmlns:pvml="urn:schemas-microsoft-com:office:powerpoint" xmlns:v="urn:schemas-microsoft-com:vml" xmlns:o="urn:schemas-microsoft-com:office:office" xmlns:dgm="http://schemas.openxmlformats.org/drawingml/2006/diagram" xmlns:c="http://schemas.openxmlformats.org/drawingml/2006/chart" xmlns:mv="urn:schemas-microsoft-com:mac:vml" xmlns:mc="http://schemas.openxmlformats.org/markup-compatibility/2006" xmlns="" r:id="rId27" roundtripDataSignature="AMtx7mjt3491jQ7aCoyIz2WXeHKroE7tpQ=="/>
     </p:ext>
@@ -263,14 +268,96 @@
 </p:presentation>
 </file>
 
-<file path=ppt/revisionInfo.xml><?xml version="1.0" encoding="utf-8"?>
-<p1510:revInfo xmlns:a="http://schemas.openxmlformats.org/drawingml/2006/main" xmlns:r="http://schemas.openxmlformats.org/officeDocument/2006/relationships" xmlns:p1510="http://schemas.microsoft.com/office/powerpoint/2015/10/main">
-  <p1510:revLst>
-    <p1510:client id="{0037A25B-DA5D-A37C-3B36-7F0977405ABF}" v="154" dt="2026-06-19T05:59:42.731"/>
-    <p1510:client id="{088AD18C-7811-B1E2-9ED5-57A1A5542DF6}" v="456" dt="2026-06-19T06:28:44.546"/>
-    <p1510:client id="{A6B9108B-7598-1D50-C4AA-8A38026DAEEF}" v="18" dt="2026-06-19T06:56:18.840"/>
-  </p1510:revLst>
-</p1510:revInfo>
+<file path=ppt/changesInfos/changesInfo1.xml><?xml version="1.0" encoding="utf-8"?>
+<pc:chgInfo xmlns:a="http://schemas.openxmlformats.org/drawingml/2006/main" xmlns:r="http://schemas.openxmlformats.org/officeDocument/2006/relationships" xmlns:ac="http://schemas.microsoft.com/office/drawing/2013/main/command" xmlns:pc="http://schemas.microsoft.com/office/powerpoint/2013/main/command">
+  <pc:docChgLst>
+    <pc:chgData name="Bhamidipati Satwika" userId="6bf3478182c057dd" providerId="LiveId" clId="{94557FD5-1A6B-4829-9A35-6955E26D4C30}"/>
+    <pc:docChg chg="addSld modSld">
+      <pc:chgData name="Bhamidipati Satwika" userId="6bf3478182c057dd" providerId="LiveId" clId="{94557FD5-1A6B-4829-9A35-6955E26D4C30}" dt="2026-09-11T14:38:53.049" v="43" actId="1076"/>
+      <pc:docMkLst>
+        <pc:docMk/>
+      </pc:docMkLst>
+      <pc:sldChg chg="addSp modSp new mod">
+        <pc:chgData name="Bhamidipati Satwika" userId="6bf3478182c057dd" providerId="LiveId" clId="{94557FD5-1A6B-4829-9A35-6955E26D4C30}" dt="2026-09-11T14:37:09.254" v="28" actId="14100"/>
+        <pc:sldMkLst>
+          <pc:docMk/>
+          <pc:sldMk cId="1587540405" sldId="291"/>
+        </pc:sldMkLst>
+        <pc:picChg chg="add mod">
+          <ac:chgData name="Bhamidipati Satwika" userId="6bf3478182c057dd" providerId="LiveId" clId="{94557FD5-1A6B-4829-9A35-6955E26D4C30}" dt="2026-09-11T14:35:31.386" v="4" actId="14100"/>
+          <ac:picMkLst>
+            <pc:docMk/>
+            <pc:sldMk cId="1587540405" sldId="291"/>
+            <ac:picMk id="3" creationId="{C5D018AA-EBDE-C3A5-E891-2BD43D217500}"/>
+          </ac:picMkLst>
+        </pc:picChg>
+        <pc:picChg chg="add mod">
+          <ac:chgData name="Bhamidipati Satwika" userId="6bf3478182c057dd" providerId="LiveId" clId="{94557FD5-1A6B-4829-9A35-6955E26D4C30}" dt="2026-09-11T14:36:00.215" v="7" actId="1076"/>
+          <ac:picMkLst>
+            <pc:docMk/>
+            <pc:sldMk cId="1587540405" sldId="291"/>
+            <ac:picMk id="5" creationId="{5FF59139-34B3-FB69-459D-5838DF56D7AD}"/>
+          </ac:picMkLst>
+        </pc:picChg>
+        <pc:picChg chg="add mod">
+          <ac:chgData name="Bhamidipati Satwika" userId="6bf3478182c057dd" providerId="LiveId" clId="{94557FD5-1A6B-4829-9A35-6955E26D4C30}" dt="2026-09-11T14:36:24.151" v="14" actId="14100"/>
+          <ac:picMkLst>
+            <pc:docMk/>
+            <pc:sldMk cId="1587540405" sldId="291"/>
+            <ac:picMk id="7" creationId="{94E6072E-703E-71E7-454F-C63ED37EA804}"/>
+          </ac:picMkLst>
+        </pc:picChg>
+        <pc:picChg chg="add mod">
+          <ac:chgData name="Bhamidipati Satwika" userId="6bf3478182c057dd" providerId="LiveId" clId="{94557FD5-1A6B-4829-9A35-6955E26D4C30}" dt="2026-09-11T14:37:09.254" v="28" actId="14100"/>
+          <ac:picMkLst>
+            <pc:docMk/>
+            <pc:sldMk cId="1587540405" sldId="291"/>
+            <ac:picMk id="9" creationId="{24A0D83E-1B6D-119A-E25E-C909B75751B1}"/>
+          </ac:picMkLst>
+        </pc:picChg>
+      </pc:sldChg>
+      <pc:sldChg chg="addSp modSp new mod">
+        <pc:chgData name="Bhamidipati Satwika" userId="6bf3478182c057dd" providerId="LiveId" clId="{94557FD5-1A6B-4829-9A35-6955E26D4C30}" dt="2026-09-11T14:38:53.049" v="43" actId="1076"/>
+        <pc:sldMkLst>
+          <pc:docMk/>
+          <pc:sldMk cId="3526925298" sldId="292"/>
+        </pc:sldMkLst>
+        <pc:picChg chg="add mod">
+          <ac:chgData name="Bhamidipati Satwika" userId="6bf3478182c057dd" providerId="LiveId" clId="{94557FD5-1A6B-4829-9A35-6955E26D4C30}" dt="2026-09-11T14:37:46.635" v="32" actId="1076"/>
+          <ac:picMkLst>
+            <pc:docMk/>
+            <pc:sldMk cId="3526925298" sldId="292"/>
+            <ac:picMk id="3" creationId="{9711FC7C-28A7-EA09-3647-D645F1BC190C}"/>
+          </ac:picMkLst>
+        </pc:picChg>
+        <pc:picChg chg="add mod">
+          <ac:chgData name="Bhamidipati Satwika" userId="6bf3478182c057dd" providerId="LiveId" clId="{94557FD5-1A6B-4829-9A35-6955E26D4C30}" dt="2026-09-11T14:38:53.049" v="43" actId="1076"/>
+          <ac:picMkLst>
+            <pc:docMk/>
+            <pc:sldMk cId="3526925298" sldId="292"/>
+            <ac:picMk id="5" creationId="{3CB46DB9-F93B-190D-DA1C-EEFA8089F9D7}"/>
+          </ac:picMkLst>
+        </pc:picChg>
+        <pc:picChg chg="add mod">
+          <ac:chgData name="Bhamidipati Satwika" userId="6bf3478182c057dd" providerId="LiveId" clId="{94557FD5-1A6B-4829-9A35-6955E26D4C30}" dt="2026-09-11T14:38:25.192" v="38" actId="1076"/>
+          <ac:picMkLst>
+            <pc:docMk/>
+            <pc:sldMk cId="3526925298" sldId="292"/>
+            <ac:picMk id="7" creationId="{B48E10AE-E644-4A7F-E43D-B3E21F377164}"/>
+          </ac:picMkLst>
+        </pc:picChg>
+        <pc:picChg chg="add mod">
+          <ac:chgData name="Bhamidipati Satwika" userId="6bf3478182c057dd" providerId="LiveId" clId="{94557FD5-1A6B-4829-9A35-6955E26D4C30}" dt="2026-09-11T14:38:50.132" v="41" actId="1076"/>
+          <ac:picMkLst>
+            <pc:docMk/>
+            <pc:sldMk cId="3526925298" sldId="292"/>
+            <ac:picMk id="9" creationId="{08F64B78-CFDE-FEB4-246B-FDB9F8E587C5}"/>
+          </ac:picMkLst>
+        </pc:picChg>
+      </pc:sldChg>
+    </pc:docChg>
+  </pc:docChgLst>
+</pc:chgInfo>
 </file>
 
 <file path=ppt/notesMasters/notesMaster1.xml><?xml version="1.0" encoding="utf-8"?>
@@ -11858,6 +11945,306 @@
   <p:cSld>
     <p:spTree>
       <p:nvGrpSpPr>
+        <p:cNvPr id="1" name=""/>
+        <p:cNvGrpSpPr/>
+        <p:nvPr/>
+      </p:nvGrpSpPr>
+      <p:grpSpPr>
+        <a:xfrm>
+          <a:off x="0" y="0"/>
+          <a:ext cx="0" cy="0"/>
+          <a:chOff x="0" y="0"/>
+          <a:chExt cx="0" cy="0"/>
+        </a:xfrm>
+      </p:grpSpPr>
+      <p:pic>
+        <p:nvPicPr>
+          <p:cNvPr id="3" name="Picture 2">
+            <a:extLst>
+              <a:ext uri="{FF2B5EF4-FFF2-40B4-BE49-F238E27FC236}">
+                <a16:creationId xmlns:a16="http://schemas.microsoft.com/office/drawing/2014/main" id="{C5D018AA-EBDE-C3A5-E891-2BD43D217500}"/>
+              </a:ext>
+            </a:extLst>
+          </p:cNvPr>
+          <p:cNvPicPr>
+            <a:picLocks noChangeAspect="1"/>
+          </p:cNvPicPr>
+          <p:nvPr/>
+        </p:nvPicPr>
+        <p:blipFill>
+          <a:blip r:embed="rId2"/>
+          <a:stretch>
+            <a:fillRect/>
+          </a:stretch>
+        </p:blipFill>
+        <p:spPr>
+          <a:xfrm>
+            <a:off x="218363" y="149557"/>
+            <a:ext cx="5776643" cy="3610402"/>
+          </a:xfrm>
+          <a:prstGeom prst="rect">
+            <a:avLst/>
+          </a:prstGeom>
+        </p:spPr>
+      </p:pic>
+      <p:pic>
+        <p:nvPicPr>
+          <p:cNvPr id="5" name="Picture 4">
+            <a:extLst>
+              <a:ext uri="{FF2B5EF4-FFF2-40B4-BE49-F238E27FC236}">
+                <a16:creationId xmlns:a16="http://schemas.microsoft.com/office/drawing/2014/main" id="{5FF59139-34B3-FB69-459D-5838DF56D7AD}"/>
+              </a:ext>
+            </a:extLst>
+          </p:cNvPr>
+          <p:cNvPicPr>
+            <a:picLocks noChangeAspect="1"/>
+          </p:cNvPicPr>
+          <p:nvPr/>
+        </p:nvPicPr>
+        <p:blipFill>
+          <a:blip r:embed="rId3"/>
+          <a:stretch>
+            <a:fillRect/>
+          </a:stretch>
+        </p:blipFill>
+        <p:spPr>
+          <a:xfrm>
+            <a:off x="5995006" y="149557"/>
+            <a:ext cx="5776643" cy="3610402"/>
+          </a:xfrm>
+          <a:prstGeom prst="rect">
+            <a:avLst/>
+          </a:prstGeom>
+        </p:spPr>
+      </p:pic>
+      <p:pic>
+        <p:nvPicPr>
+          <p:cNvPr id="7" name="Picture 6">
+            <a:extLst>
+              <a:ext uri="{FF2B5EF4-FFF2-40B4-BE49-F238E27FC236}">
+                <a16:creationId xmlns:a16="http://schemas.microsoft.com/office/drawing/2014/main" id="{94E6072E-703E-71E7-454F-C63ED37EA804}"/>
+              </a:ext>
+            </a:extLst>
+          </p:cNvPr>
+          <p:cNvPicPr>
+            <a:picLocks noChangeAspect="1"/>
+          </p:cNvPicPr>
+          <p:nvPr/>
+        </p:nvPicPr>
+        <p:blipFill>
+          <a:blip r:embed="rId4"/>
+          <a:stretch>
+            <a:fillRect/>
+          </a:stretch>
+        </p:blipFill>
+        <p:spPr>
+          <a:xfrm>
+            <a:off x="218364" y="3759960"/>
+            <a:ext cx="5776642" cy="3032362"/>
+          </a:xfrm>
+          <a:prstGeom prst="rect">
+            <a:avLst/>
+          </a:prstGeom>
+        </p:spPr>
+      </p:pic>
+      <p:pic>
+        <p:nvPicPr>
+          <p:cNvPr id="9" name="Picture 8">
+            <a:extLst>
+              <a:ext uri="{FF2B5EF4-FFF2-40B4-BE49-F238E27FC236}">
+                <a16:creationId xmlns:a16="http://schemas.microsoft.com/office/drawing/2014/main" id="{24A0D83E-1B6D-119A-E25E-C909B75751B1}"/>
+              </a:ext>
+            </a:extLst>
+          </p:cNvPr>
+          <p:cNvPicPr>
+            <a:picLocks noChangeAspect="1"/>
+          </p:cNvPicPr>
+          <p:nvPr/>
+        </p:nvPicPr>
+        <p:blipFill>
+          <a:blip r:embed="rId5"/>
+          <a:stretch>
+            <a:fillRect/>
+          </a:stretch>
+        </p:blipFill>
+        <p:spPr>
+          <a:xfrm>
+            <a:off x="5995005" y="3783842"/>
+            <a:ext cx="5776642" cy="3013028"/>
+          </a:xfrm>
+          <a:prstGeom prst="rect">
+            <a:avLst/>
+          </a:prstGeom>
+        </p:spPr>
+      </p:pic>
+    </p:spTree>
+    <p:extLst>
+      <p:ext uri="{BB962C8B-B14F-4D97-AF65-F5344CB8AC3E}">
+        <p14:creationId xmlns:p14="http://schemas.microsoft.com/office/powerpoint/2010/main" val="1587540405"/>
+      </p:ext>
+    </p:extLst>
+  </p:cSld>
+  <p:clrMapOvr>
+    <a:masterClrMapping/>
+  </p:clrMapOvr>
+</p:sld>
+</file>
+
+<file path=ppt/slides/slide12.xml><?xml version="1.0" encoding="utf-8"?>
+<p:sld xmlns:a="http://schemas.openxmlformats.org/drawingml/2006/main" xmlns:r="http://schemas.openxmlformats.org/officeDocument/2006/relationships" xmlns:p="http://schemas.openxmlformats.org/presentationml/2006/main">
+  <p:cSld>
+    <p:spTree>
+      <p:nvGrpSpPr>
+        <p:cNvPr id="1" name=""/>
+        <p:cNvGrpSpPr/>
+        <p:nvPr/>
+      </p:nvGrpSpPr>
+      <p:grpSpPr>
+        <a:xfrm>
+          <a:off x="0" y="0"/>
+          <a:ext cx="0" cy="0"/>
+          <a:chOff x="0" y="0"/>
+          <a:chExt cx="0" cy="0"/>
+        </a:xfrm>
+      </p:grpSpPr>
+      <p:pic>
+        <p:nvPicPr>
+          <p:cNvPr id="3" name="Picture 2">
+            <a:extLst>
+              <a:ext uri="{FF2B5EF4-FFF2-40B4-BE49-F238E27FC236}">
+                <a16:creationId xmlns:a16="http://schemas.microsoft.com/office/drawing/2014/main" id="{9711FC7C-28A7-EA09-3647-D645F1BC190C}"/>
+              </a:ext>
+            </a:extLst>
+          </p:cNvPr>
+          <p:cNvPicPr>
+            <a:picLocks noChangeAspect="1"/>
+          </p:cNvPicPr>
+          <p:nvPr/>
+        </p:nvPicPr>
+        <p:blipFill>
+          <a:blip r:embed="rId2"/>
+          <a:stretch>
+            <a:fillRect/>
+          </a:stretch>
+        </p:blipFill>
+        <p:spPr>
+          <a:xfrm>
+            <a:off x="138752" y="122830"/>
+            <a:ext cx="4869522" cy="3043451"/>
+          </a:xfrm>
+          <a:prstGeom prst="rect">
+            <a:avLst/>
+          </a:prstGeom>
+        </p:spPr>
+      </p:pic>
+      <p:pic>
+        <p:nvPicPr>
+          <p:cNvPr id="5" name="Picture 4">
+            <a:extLst>
+              <a:ext uri="{FF2B5EF4-FFF2-40B4-BE49-F238E27FC236}">
+                <a16:creationId xmlns:a16="http://schemas.microsoft.com/office/drawing/2014/main" id="{3CB46DB9-F93B-190D-DA1C-EEFA8089F9D7}"/>
+              </a:ext>
+            </a:extLst>
+          </p:cNvPr>
+          <p:cNvPicPr>
+            <a:picLocks noChangeAspect="1"/>
+          </p:cNvPicPr>
+          <p:nvPr/>
+        </p:nvPicPr>
+        <p:blipFill>
+          <a:blip r:embed="rId3"/>
+          <a:stretch>
+            <a:fillRect/>
+          </a:stretch>
+        </p:blipFill>
+        <p:spPr>
+          <a:xfrm>
+            <a:off x="5809397" y="122829"/>
+            <a:ext cx="4869522" cy="3043451"/>
+          </a:xfrm>
+          <a:prstGeom prst="rect">
+            <a:avLst/>
+          </a:prstGeom>
+        </p:spPr>
+      </p:pic>
+      <p:pic>
+        <p:nvPicPr>
+          <p:cNvPr id="7" name="Picture 6">
+            <a:extLst>
+              <a:ext uri="{FF2B5EF4-FFF2-40B4-BE49-F238E27FC236}">
+                <a16:creationId xmlns:a16="http://schemas.microsoft.com/office/drawing/2014/main" id="{B48E10AE-E644-4A7F-E43D-B3E21F377164}"/>
+              </a:ext>
+            </a:extLst>
+          </p:cNvPr>
+          <p:cNvPicPr>
+            <a:picLocks noChangeAspect="1"/>
+          </p:cNvPicPr>
+          <p:nvPr/>
+        </p:nvPicPr>
+        <p:blipFill>
+          <a:blip r:embed="rId4"/>
+          <a:stretch>
+            <a:fillRect/>
+          </a:stretch>
+        </p:blipFill>
+        <p:spPr>
+          <a:xfrm>
+            <a:off x="138752" y="3429000"/>
+            <a:ext cx="5202072" cy="3251295"/>
+          </a:xfrm>
+          <a:prstGeom prst="rect">
+            <a:avLst/>
+          </a:prstGeom>
+        </p:spPr>
+      </p:pic>
+      <p:pic>
+        <p:nvPicPr>
+          <p:cNvPr id="9" name="Picture 8">
+            <a:extLst>
+              <a:ext uri="{FF2B5EF4-FFF2-40B4-BE49-F238E27FC236}">
+                <a16:creationId xmlns:a16="http://schemas.microsoft.com/office/drawing/2014/main" id="{08F64B78-CFDE-FEB4-246B-FDB9F8E587C5}"/>
+              </a:ext>
+            </a:extLst>
+          </p:cNvPr>
+          <p:cNvPicPr>
+            <a:picLocks noChangeAspect="1"/>
+          </p:cNvPicPr>
+          <p:nvPr/>
+        </p:nvPicPr>
+        <p:blipFill>
+          <a:blip r:embed="rId5"/>
+          <a:stretch>
+            <a:fillRect/>
+          </a:stretch>
+        </p:blipFill>
+        <p:spPr>
+          <a:xfrm>
+            <a:off x="5993642" y="3272619"/>
+            <a:ext cx="5702490" cy="3564056"/>
+          </a:xfrm>
+          <a:prstGeom prst="rect">
+            <a:avLst/>
+          </a:prstGeom>
+        </p:spPr>
+      </p:pic>
+    </p:spTree>
+    <p:extLst>
+      <p:ext uri="{BB962C8B-B14F-4D97-AF65-F5344CB8AC3E}">
+        <p14:creationId xmlns:p14="http://schemas.microsoft.com/office/powerpoint/2010/main" val="3526925298"/>
+      </p:ext>
+    </p:extLst>
+  </p:cSld>
+  <p:clrMapOvr>
+    <a:masterClrMapping/>
+  </p:clrMapOvr>
+</p:sld>
+</file>
+
+<file path=ppt/slides/slide13.xml><?xml version="1.0" encoding="utf-8"?>
+<p:sld xmlns:a="http://schemas.openxmlformats.org/drawingml/2006/main" xmlns:r="http://schemas.openxmlformats.org/officeDocument/2006/relationships" xmlns:p="http://schemas.openxmlformats.org/presentationml/2006/main">
+  <p:cSld>
+    <p:spTree>
+      <p:nvGrpSpPr>
         <p:cNvPr id="1" name="Shape 274">
           <a:extLst>
             <a:ext uri="{FF2B5EF4-FFF2-40B4-BE49-F238E27FC236}">
@@ -12302,7 +12689,7 @@
 </p:sld>
 </file>
 
-<file path=ppt/slides/slide12.xml><?xml version="1.0" encoding="utf-8"?>
+<file path=ppt/slides/slide14.xml><?xml version="1.0" encoding="utf-8"?>
 <p:sld xmlns:a="http://schemas.openxmlformats.org/drawingml/2006/main" xmlns:r="http://schemas.openxmlformats.org/officeDocument/2006/relationships" xmlns:p="http://schemas.openxmlformats.org/presentationml/2006/main">
   <p:cSld>
     <p:spTree>
@@ -12634,7 +13021,7 @@
 </p:sld>
 </file>
 
-<file path=ppt/slides/slide13.xml><?xml version="1.0" encoding="utf-8"?>
+<file path=ppt/slides/slide15.xml><?xml version="1.0" encoding="utf-8"?>
 <p:sld xmlns:a="http://schemas.openxmlformats.org/drawingml/2006/main" xmlns:r="http://schemas.openxmlformats.org/officeDocument/2006/relationships" xmlns:p="http://schemas.openxmlformats.org/presentationml/2006/main">
   <p:cSld>
     <p:spTree>
@@ -12774,7 +13161,7 @@
 </p:sld>
 </file>
 
-<file path=ppt/slides/slide14.xml><?xml version="1.0" encoding="utf-8"?>
+<file path=ppt/slides/slide16.xml><?xml version="1.0" encoding="utf-8"?>
 <p:sld xmlns:a="http://schemas.openxmlformats.org/drawingml/2006/main" xmlns:r="http://schemas.openxmlformats.org/officeDocument/2006/relationships" xmlns:p="http://schemas.openxmlformats.org/presentationml/2006/main">
   <p:cSld>
     <p:spTree>
@@ -12931,7 +13318,7 @@
 </p:sld>
 </file>
 
-<file path=ppt/slides/slide15.xml><?xml version="1.0" encoding="utf-8"?>
+<file path=ppt/slides/slide17.xml><?xml version="1.0" encoding="utf-8"?>
 <p:sld xmlns:a="http://schemas.openxmlformats.org/drawingml/2006/main" xmlns:r="http://schemas.openxmlformats.org/officeDocument/2006/relationships" xmlns:p="http://schemas.openxmlformats.org/presentationml/2006/main">
   <p:cSld>
     <p:spTree>
